--- a/courses/COLL150-Fall26/Slides/Unit 2 - Frankenstein.pptx
+++ b/courses/COLL150-Fall26/Slides/Unit 2 - Frankenstein.pptx
@@ -15612,7 +15612,7 @@
                 <a:ea typeface="Calibri" pitchFamily="34" charset="-122"/>
                 <a:cs typeface="Calibri" pitchFamily="34" charset="-120"/>
               </a:rPr>
-              <a:t>Volume III, chapters I–VII and Walton in continuation  ·  1:54–2:18</a:t>
+              <a:t>Volume III, chapters I–VII and Walton in continuation  </a:t>
             </a:r>
             <a:endParaRPr lang="en-US" sz="1500" dirty="0"/>
           </a:p>
@@ -18967,7 +18967,7 @@
                 <a:ea typeface="Calibri" pitchFamily="34" charset="-122"/>
                 <a:cs typeface="Calibri" pitchFamily="34" charset="-120"/>
               </a:rPr>
-              <a:t>The 1831 Introduction  ·  Brantlinger, “The Reading Monster”  ·  2:26–3:00</a:t>
+              <a:t>The 1831 Introduction  ·  Brantlinger, “The Reading Monster”</a:t>
             </a:r>
             <a:endParaRPr lang="en-US" sz="1500" dirty="0"/>
           </a:p>
@@ -22531,7 +22531,7 @@
               <a:buNone/>
             </a:pPr>
             <a:r>
-              <a:rPr lang="en-US" sz="1100" b="1" kern="0" spc="160" dirty="0">
+              <a:rPr lang="en-US" sz="1100" b="1" kern="0" spc="160">
                 <a:solidFill>
                   <a:srgbClr val="E08A6E"/>
                 </a:solidFill>
@@ -22539,7 +22539,7 @@
                 <a:ea typeface="Calibri" pitchFamily="34" charset="-122"/>
                 <a:cs typeface="Calibri" pitchFamily="34" charset="-120"/>
               </a:rPr>
-              <a:t>EXIT TICKET · EIGHT MINUTES · HANDED IN</a:t>
+              <a:t>EXIT TICKET</a:t>
             </a:r>
             <a:endParaRPr lang="en-US" sz="1100" dirty="0"/>
           </a:p>
